--- a/presentations/PR_L03_DecisionGate_Lesson.pptx
+++ b/presentations/PR_L03_DecisionGate_Lesson.pptx
@@ -2617,7 +2617,7 @@
                 <a:ea typeface="IBM Plex Sans" pitchFamily="34" charset="-122"/>
                 <a:cs typeface="IBM Plex Sans" pitchFamily="34" charset="-120"/>
               </a:rPr>
-              <a:t>Mistake: using &gt; where the rule says 'or more', which loses the boundary value.</a:t>
+              <a:t>Common mistake: using &gt; where the rule says 'or more', which loses the boundary value.</a:t>
             </a:r>
             <a:endParaRPr lang="en-US" sz="1700" dirty="0"/>
           </a:p>
@@ -7971,7 +7971,7 @@
                 <a:ea typeface="IBM Plex Sans" pitchFamily="34" charset="-122"/>
                 <a:cs typeface="IBM Plex Sans" pitchFamily="34" charset="-120"/>
               </a:rPr>
-              <a:t>Mistake: comparing with one =, when one = stores a value and two compare them.</a:t>
+              <a:t>Common mistake: comparing with one =, when one = stores a value and two compare them.</a:t>
             </a:r>
             <a:endParaRPr lang="en-US" sz="1700" dirty="0"/>
           </a:p>
@@ -8547,7 +8547,7 @@
                 <a:ea typeface="IBM Plex Sans" pitchFamily="34" charset="-122"/>
                 <a:cs typeface="IBM Plex Sans" pitchFamily="34" charset="-120"/>
               </a:rPr>
-              <a:t>Mistake: missing the colon, or not indenting the block underneath it.</a:t>
+              <a:t>Common mistake: missing the colon, or not indenting the block underneath it.</a:t>
             </a:r>
             <a:endParaRPr lang="en-US" sz="1700" dirty="0"/>
           </a:p>
@@ -9123,7 +9123,7 @@
                 <a:ea typeface="IBM Plex Sans" pitchFamily="34" charset="-122"/>
                 <a:cs typeface="IBM Plex Sans" pitchFamily="34" charset="-120"/>
               </a:rPr>
-              <a:t>Mistake: putting a wide band first, so it catches everything and the later branches never run.</a:t>
+              <a:t>Common mistake: putting a wide band first, so it catches everything and the later branches never run.</a:t>
             </a:r>
             <a:endParaRPr lang="en-US" sz="1700" dirty="0"/>
           </a:p>
@@ -9699,7 +9699,7 @@
                 <a:ea typeface="IBM Plex Sans" pitchFamily="34" charset="-122"/>
                 <a:cs typeface="IBM Plex Sans" pitchFamily="34" charset="-120"/>
               </a:rPr>
-              <a:t>Mistake: writing wind &lt; 20 or 30, which Python reads as something quite different.</a:t>
+              <a:t>Common mistake: writing wind &lt; 20 or 30, which Python reads as something quite different.</a:t>
             </a:r>
             <a:endParaRPr lang="en-US" sz="1700" dirty="0"/>
           </a:p>
@@ -10275,7 +10275,7 @@
                 <a:ea typeface="IBM Plex Sans" pitchFamily="34" charset="-122"/>
                 <a:cs typeface="IBM Plex Sans" pitchFamily="34" charset="-120"/>
               </a:rPr>
-              <a:t>Mistake: nesting where a single and would have said the same thing far more clearly.</a:t>
+              <a:t>Common mistake: nesting where a single and would have said the same thing far more clearly.</a:t>
             </a:r>
             <a:endParaRPr lang="en-US" sz="1700" dirty="0"/>
           </a:p>
